--- a/개발계획.pptx
+++ b/개발계획.pptx
@@ -7,6 +7,7 @@
   <p:sldIdLst>
     <p:sldId id="256" r:id="rId2"/>
     <p:sldId id="257" r:id="rId3"/>
+    <p:sldId id="258" r:id="rId4"/>
   </p:sldIdLst>
   <p:sldSz cx="12192000" cy="6858000"/>
   <p:notesSz cx="6858000" cy="9144000"/>
@@ -297,7 +298,7 @@
           <a:p>
             <a:fld id="{DEC7BE5B-A439-4C5C-87EC-0BA8568C23B4}" type="datetimeFigureOut">
               <a:rPr lang="ko-KR" altLang="en-US" smtClean="0"/>
-              <a:t>2026-09-17</a:t>
+              <a:t>2026-09-23</a:t>
             </a:fld>
             <a:endParaRPr lang="ko-KR" altLang="en-US"/>
           </a:p>
@@ -495,7 +496,7 @@
           <a:p>
             <a:fld id="{DEC7BE5B-A439-4C5C-87EC-0BA8568C23B4}" type="datetimeFigureOut">
               <a:rPr lang="ko-KR" altLang="en-US" smtClean="0"/>
-              <a:t>2026-09-17</a:t>
+              <a:t>2026-09-23</a:t>
             </a:fld>
             <a:endParaRPr lang="ko-KR" altLang="en-US"/>
           </a:p>
@@ -703,7 +704,7 @@
           <a:p>
             <a:fld id="{DEC7BE5B-A439-4C5C-87EC-0BA8568C23B4}" type="datetimeFigureOut">
               <a:rPr lang="ko-KR" altLang="en-US" smtClean="0"/>
-              <a:t>2026-09-17</a:t>
+              <a:t>2026-09-23</a:t>
             </a:fld>
             <a:endParaRPr lang="ko-KR" altLang="en-US"/>
           </a:p>
@@ -901,7 +902,7 @@
           <a:p>
             <a:fld id="{DEC7BE5B-A439-4C5C-87EC-0BA8568C23B4}" type="datetimeFigureOut">
               <a:rPr lang="ko-KR" altLang="en-US" smtClean="0"/>
-              <a:t>2026-09-17</a:t>
+              <a:t>2026-09-23</a:t>
             </a:fld>
             <a:endParaRPr lang="ko-KR" altLang="en-US"/>
           </a:p>
@@ -1176,7 +1177,7 @@
           <a:p>
             <a:fld id="{DEC7BE5B-A439-4C5C-87EC-0BA8568C23B4}" type="datetimeFigureOut">
               <a:rPr lang="ko-KR" altLang="en-US" smtClean="0"/>
-              <a:t>2026-09-17</a:t>
+              <a:t>2026-09-23</a:t>
             </a:fld>
             <a:endParaRPr lang="ko-KR" altLang="en-US"/>
           </a:p>
@@ -1441,7 +1442,7 @@
           <a:p>
             <a:fld id="{DEC7BE5B-A439-4C5C-87EC-0BA8568C23B4}" type="datetimeFigureOut">
               <a:rPr lang="ko-KR" altLang="en-US" smtClean="0"/>
-              <a:t>2026-09-17</a:t>
+              <a:t>2026-09-23</a:t>
             </a:fld>
             <a:endParaRPr lang="ko-KR" altLang="en-US"/>
           </a:p>
@@ -1853,7 +1854,7 @@
           <a:p>
             <a:fld id="{DEC7BE5B-A439-4C5C-87EC-0BA8568C23B4}" type="datetimeFigureOut">
               <a:rPr lang="ko-KR" altLang="en-US" smtClean="0"/>
-              <a:t>2026-09-17</a:t>
+              <a:t>2026-09-23</a:t>
             </a:fld>
             <a:endParaRPr lang="ko-KR" altLang="en-US"/>
           </a:p>
@@ -1994,7 +1995,7 @@
           <a:p>
             <a:fld id="{DEC7BE5B-A439-4C5C-87EC-0BA8568C23B4}" type="datetimeFigureOut">
               <a:rPr lang="ko-KR" altLang="en-US" smtClean="0"/>
-              <a:t>2026-09-17</a:t>
+              <a:t>2026-09-23</a:t>
             </a:fld>
             <a:endParaRPr lang="ko-KR" altLang="en-US"/>
           </a:p>
@@ -2107,7 +2108,7 @@
           <a:p>
             <a:fld id="{DEC7BE5B-A439-4C5C-87EC-0BA8568C23B4}" type="datetimeFigureOut">
               <a:rPr lang="ko-KR" altLang="en-US" smtClean="0"/>
-              <a:t>2026-09-17</a:t>
+              <a:t>2026-09-23</a:t>
             </a:fld>
             <a:endParaRPr lang="ko-KR" altLang="en-US"/>
           </a:p>
@@ -2418,7 +2419,7 @@
           <a:p>
             <a:fld id="{DEC7BE5B-A439-4C5C-87EC-0BA8568C23B4}" type="datetimeFigureOut">
               <a:rPr lang="ko-KR" altLang="en-US" smtClean="0"/>
-              <a:t>2026-09-17</a:t>
+              <a:t>2026-09-23</a:t>
             </a:fld>
             <a:endParaRPr lang="ko-KR" altLang="en-US"/>
           </a:p>
@@ -2706,7 +2707,7 @@
           <a:p>
             <a:fld id="{DEC7BE5B-A439-4C5C-87EC-0BA8568C23B4}" type="datetimeFigureOut">
               <a:rPr lang="ko-KR" altLang="en-US" smtClean="0"/>
-              <a:t>2026-09-17</a:t>
+              <a:t>2026-09-23</a:t>
             </a:fld>
             <a:endParaRPr lang="ko-KR" altLang="en-US"/>
           </a:p>
@@ -2947,7 +2948,7 @@
           <a:p>
             <a:fld id="{DEC7BE5B-A439-4C5C-87EC-0BA8568C23B4}" type="datetimeFigureOut">
               <a:rPr lang="ko-KR" altLang="en-US" smtClean="0"/>
-              <a:t>2026-09-17</a:t>
+              <a:t>2026-09-23</a:t>
             </a:fld>
             <a:endParaRPr lang="ko-KR" altLang="en-US"/>
           </a:p>
@@ -4059,350 +4060,406 @@
           <a:lstStyle/>
           <a:p>
             <a:r>
-              <a:rPr lang="en-US" altLang="ko-KR"/>
+              <a:rPr lang="en-US" altLang="ko-KR" dirty="0"/>
               <a:t>[</a:t>
             </a:r>
             <a:r>
-              <a:rPr lang="ko-KR" altLang="en-US"/>
+              <a:rPr lang="ko-KR" altLang="en-US" dirty="0"/>
               <a:t>설명</a:t>
             </a:r>
             <a:r>
-              <a:rPr lang="en-US" altLang="ko-KR"/>
+              <a:rPr lang="en-US" altLang="ko-KR" dirty="0"/>
               <a:t>]</a:t>
             </a:r>
           </a:p>
           <a:p>
             <a:r>
-              <a:rPr lang="ko-KR" altLang="en-US"/>
+              <a:rPr lang="ko-KR" altLang="en-US" dirty="0"/>
               <a:t>이것은 팔레트를 순환하는 흐름도이다</a:t>
             </a:r>
             <a:r>
-              <a:rPr lang="en-US" altLang="ko-KR"/>
+              <a:rPr lang="en-US" altLang="ko-KR" dirty="0"/>
               <a:t>.(</a:t>
             </a:r>
             <a:r>
-              <a:rPr lang="ko-KR" altLang="en-US"/>
+              <a:rPr lang="ko-KR" altLang="en-US" dirty="0"/>
               <a:t>전시회에서 데모하기 위함</a:t>
             </a:r>
             <a:r>
-              <a:rPr lang="en-US" altLang="ko-KR"/>
+              <a:rPr lang="en-US" altLang="ko-KR" dirty="0"/>
               <a:t>)</a:t>
             </a:r>
           </a:p>
           <a:p>
             <a:r>
-              <a:rPr lang="en-US" altLang="ko-KR"/>
+              <a:rPr lang="en-US" altLang="ko-KR" dirty="0"/>
               <a:t>A, B, C, D, X1, X2</a:t>
             </a:r>
             <a:r>
-              <a:rPr lang="ko-KR" altLang="en-US"/>
+              <a:rPr lang="ko-KR" altLang="en-US" dirty="0"/>
               <a:t>는 팔레트가 놓여지는 곳으로 노드라 한다</a:t>
             </a:r>
             <a:r>
-              <a:rPr lang="en-US" altLang="ko-KR"/>
+              <a:rPr lang="en-US" altLang="ko-KR" dirty="0"/>
               <a:t>.</a:t>
             </a:r>
           </a:p>
           <a:p>
             <a:r>
-              <a:rPr lang="ko-KR" altLang="en-US"/>
+              <a:rPr lang="ko-KR" altLang="en-US" dirty="0"/>
               <a:t>팔레트가 이동하는 흐름은 시계방향</a:t>
             </a:r>
             <a:r>
-              <a:rPr lang="en-US" altLang="ko-KR"/>
+              <a:rPr lang="en-US" altLang="ko-KR" dirty="0"/>
               <a:t>(</a:t>
             </a:r>
             <a:r>
-              <a:rPr lang="ko-KR" altLang="en-US"/>
+              <a:rPr lang="ko-KR" altLang="en-US" dirty="0"/>
               <a:t>단방향</a:t>
             </a:r>
             <a:r>
-              <a:rPr lang="en-US" altLang="ko-KR"/>
+              <a:rPr lang="en-US" altLang="ko-KR" dirty="0"/>
               <a:t>)</a:t>
             </a:r>
             <a:r>
-              <a:rPr lang="ko-KR" altLang="en-US"/>
+              <a:rPr lang="ko-KR" altLang="en-US" dirty="0"/>
               <a:t>이다</a:t>
             </a:r>
             <a:r>
-              <a:rPr lang="en-US" altLang="ko-KR"/>
+              <a:rPr lang="en-US" altLang="ko-KR" dirty="0"/>
               <a:t>. </a:t>
             </a:r>
             <a:r>
-              <a:rPr lang="ko-KR" altLang="en-US"/>
+              <a:rPr lang="ko-KR" altLang="en-US" dirty="0"/>
               <a:t>노드와 노드 사이를 링크라고 한다</a:t>
             </a:r>
             <a:r>
-              <a:rPr lang="en-US" altLang="ko-KR"/>
+              <a:rPr lang="en-US" altLang="ko-KR" dirty="0"/>
               <a:t>.</a:t>
             </a:r>
           </a:p>
           <a:p>
             <a:r>
-              <a:rPr lang="ko-KR" altLang="en-US"/>
+              <a:rPr lang="ko-KR" altLang="en-US" dirty="0"/>
               <a:t>노</a:t>
             </a:r>
             <a:r>
-              <a:rPr lang="ko-KR" altLang="ko-KR"/>
+              <a:rPr lang="ko-KR" altLang="ko-KR" dirty="0"/>
               <a:t>드에는 반드시 하나의 팔레트만 놓일 수 있고, 링크에서 이동도 하나의 팔레트만 할 수 있</a:t>
             </a:r>
             <a:r>
-              <a:rPr lang="ko-KR" altLang="en-US"/>
+              <a:rPr lang="ko-KR" altLang="en-US" dirty="0"/>
               <a:t>다</a:t>
             </a:r>
             <a:r>
-              <a:rPr lang="ko-KR" altLang="ko-KR"/>
+              <a:rPr lang="ko-KR" altLang="ko-KR" dirty="0"/>
               <a:t>. </a:t>
             </a:r>
-            <a:endParaRPr lang="en-US" altLang="ko-KR"/>
-          </a:p>
-          <a:p>
-            <a:r>
-              <a:rPr lang="ko-KR" altLang="en-US"/>
-              <a:t>모든 노드에서 팔레트 유무는 중앙관제된다</a:t>
-            </a:r>
-            <a:r>
-              <a:rPr lang="en-US" altLang="ko-KR"/>
+            <a:endParaRPr lang="en-US" altLang="ko-KR" dirty="0"/>
+          </a:p>
+          <a:p>
+            <a:r>
+              <a:rPr lang="ko-KR" altLang="en-US" dirty="0"/>
+              <a:t>모든 노드에서 팔레트 유무는 </a:t>
+            </a:r>
+            <a:r>
+              <a:rPr lang="ko-KR" altLang="en-US" dirty="0" err="1"/>
+              <a:t>중앙관제된다</a:t>
+            </a:r>
+            <a:r>
+              <a:rPr lang="en-US" altLang="ko-KR" dirty="0"/>
               <a:t>.</a:t>
             </a:r>
           </a:p>
           <a:p>
             <a:r>
-              <a:rPr lang="ko-KR" altLang="en-US"/>
+              <a:rPr lang="ko-KR" altLang="en-US" dirty="0"/>
               <a:t>작동조건은 단 하나이다</a:t>
             </a:r>
             <a:r>
-              <a:rPr lang="en-US" altLang="ko-KR"/>
+              <a:rPr lang="en-US" altLang="ko-KR" dirty="0"/>
               <a:t>. (</a:t>
             </a:r>
             <a:r>
-              <a:rPr lang="ko-KR" altLang="en-US"/>
-              <a:t>이전노드에 팔레트가 있고</a:t>
-            </a:r>
-            <a:r>
-              <a:rPr lang="en-US" altLang="ko-KR"/>
+              <a:rPr lang="ko-KR" altLang="en-US" dirty="0" err="1"/>
+              <a:t>이전노드에</a:t>
+            </a:r>
+            <a:r>
+              <a:rPr lang="ko-KR" altLang="en-US" dirty="0"/>
+              <a:t> 팔레트가 있고</a:t>
+            </a:r>
+            <a:r>
+              <a:rPr lang="en-US" altLang="ko-KR" dirty="0"/>
               <a:t>, </a:t>
             </a:r>
             <a:r>
-              <a:rPr lang="ko-KR" altLang="en-US"/>
-              <a:t>다음노드에 팔레트가 없으면 팔레트를 이동시킴</a:t>
-            </a:r>
-            <a:r>
-              <a:rPr lang="en-US" altLang="ko-KR"/>
+              <a:rPr lang="ko-KR" altLang="en-US" dirty="0" err="1"/>
+              <a:t>다음노드에</a:t>
+            </a:r>
+            <a:r>
+              <a:rPr lang="ko-KR" altLang="en-US" dirty="0"/>
+              <a:t> 팔레트가 없으면 팔레트를 이동시킴</a:t>
+            </a:r>
+            <a:r>
+              <a:rPr lang="en-US" altLang="ko-KR" dirty="0"/>
               <a:t>)</a:t>
             </a:r>
           </a:p>
           <a:p>
             <a:r>
-              <a:rPr lang="ko-KR" altLang="en-US"/>
-              <a:t>팔레트가 다음노드까지 완전히 옮겨진 후에야 이전노드와 다음노드의 상태는 바뀌고</a:t>
-            </a:r>
-            <a:r>
-              <a:rPr lang="en-US" altLang="ko-KR"/>
+              <a:rPr lang="ko-KR" altLang="en-US" dirty="0"/>
+              <a:t>팔레트가 </a:t>
+            </a:r>
+            <a:r>
+              <a:rPr lang="ko-KR" altLang="en-US" dirty="0" err="1"/>
+              <a:t>다음노드까지</a:t>
+            </a:r>
+            <a:r>
+              <a:rPr lang="ko-KR" altLang="en-US" dirty="0"/>
+              <a:t> 완전히 옮겨진 </a:t>
+            </a:r>
+            <a:r>
+              <a:rPr lang="ko-KR" altLang="en-US" dirty="0" err="1"/>
+              <a:t>후에야</a:t>
+            </a:r>
+            <a:r>
+              <a:rPr lang="ko-KR" altLang="en-US" dirty="0"/>
+              <a:t> </a:t>
+            </a:r>
+            <a:r>
+              <a:rPr lang="ko-KR" altLang="en-US" dirty="0" err="1"/>
+              <a:t>이전노드와</a:t>
+            </a:r>
+            <a:r>
+              <a:rPr lang="ko-KR" altLang="en-US" dirty="0"/>
+              <a:t> </a:t>
+            </a:r>
+            <a:r>
+              <a:rPr lang="ko-KR" altLang="en-US" dirty="0" err="1"/>
+              <a:t>다음노드의</a:t>
+            </a:r>
+            <a:r>
+              <a:rPr lang="ko-KR" altLang="en-US" dirty="0"/>
+              <a:t> 상태는 바뀌고</a:t>
+            </a:r>
+            <a:r>
+              <a:rPr lang="en-US" altLang="ko-KR" dirty="0"/>
               <a:t>, </a:t>
             </a:r>
             <a:r>
-              <a:rPr lang="ko-KR" altLang="en-US"/>
+              <a:rPr lang="ko-KR" altLang="en-US" dirty="0"/>
               <a:t>팔레트 이동 명령도</a:t>
             </a:r>
             <a:br>
-              <a:rPr lang="en-US" altLang="ko-KR"/>
+              <a:rPr lang="en-US" altLang="ko-KR" dirty="0"/>
             </a:br>
             <a:r>
-              <a:rPr lang="ko-KR" altLang="en-US"/>
+              <a:rPr lang="ko-KR" altLang="en-US" dirty="0"/>
               <a:t> 그 후에 생성된다</a:t>
             </a:r>
             <a:r>
-              <a:rPr lang="en-US" altLang="ko-KR"/>
+              <a:rPr lang="en-US" altLang="ko-KR" dirty="0"/>
               <a:t>. </a:t>
             </a:r>
             <a:br>
-              <a:rPr lang="en-US" altLang="ko-KR"/>
+              <a:rPr lang="en-US" altLang="ko-KR" dirty="0"/>
             </a:br>
             <a:r>
-              <a:rPr lang="ko-KR" altLang="ko-KR"/>
-              <a:t>이전노드에는 팔레트가 있고 다음노드에 없는 조건이 성립하면 여러 곳(링크)에서 동시에 팔레트가 옮겨져도 돼.</a:t>
+              <a:rPr lang="ko-KR" altLang="ko-KR" dirty="0" err="1"/>
+              <a:t>이전노드에는</a:t>
+            </a:r>
+            <a:r>
+              <a:rPr lang="ko-KR" altLang="ko-KR" dirty="0"/>
+              <a:t> 팔레트가 있고 </a:t>
+            </a:r>
+            <a:r>
+              <a:rPr lang="ko-KR" altLang="ko-KR" dirty="0" err="1"/>
+              <a:t>다음노드에</a:t>
+            </a:r>
+            <a:r>
+              <a:rPr lang="ko-KR" altLang="ko-KR" dirty="0"/>
+              <a:t> 없는 조건이 성립하면 여러 곳(링크)에서 동시에 팔레트가 옮겨져도 돼.</a:t>
             </a:r>
             <a:br>
-              <a:rPr lang="en-US" altLang="ko-KR"/>
+              <a:rPr lang="en-US" altLang="ko-KR" dirty="0"/>
             </a:br>
             <a:r>
-              <a:rPr lang="ko-KR" altLang="ko-KR"/>
+              <a:rPr lang="ko-KR" altLang="ko-KR" dirty="0"/>
               <a:t>단지 그것들이 같은 링크에서 겹치게 해서는 안된다</a:t>
             </a:r>
             <a:r>
-              <a:rPr lang="en-US" altLang="ko-KR"/>
+              <a:rPr lang="en-US" altLang="ko-KR" dirty="0"/>
               <a:t>.</a:t>
             </a:r>
           </a:p>
           <a:p>
             <a:r>
-              <a:rPr lang="ko-KR" altLang="en-US"/>
+              <a:rPr lang="ko-KR" altLang="en-US" dirty="0"/>
               <a:t>팔레트가 있으면 노드의 색상을 노란색으로 표시한다</a:t>
             </a:r>
             <a:r>
-              <a:rPr lang="en-US" altLang="ko-KR"/>
+              <a:rPr lang="en-US" altLang="ko-KR" dirty="0"/>
               <a:t>.</a:t>
             </a:r>
           </a:p>
           <a:p>
-            <a:endParaRPr lang="en-US" altLang="ko-KR"/>
-          </a:p>
-          <a:p>
-            <a:r>
-              <a:rPr lang="en-US" altLang="ko-KR"/>
+            <a:endParaRPr lang="en-US" altLang="ko-KR" dirty="0"/>
+          </a:p>
+          <a:p>
+            <a:r>
+              <a:rPr lang="en-US" altLang="ko-KR" dirty="0"/>
               <a:t>[</a:t>
             </a:r>
             <a:r>
-              <a:rPr lang="ko-KR" altLang="en-US"/>
+              <a:rPr lang="ko-KR" altLang="en-US" dirty="0"/>
               <a:t>개발목표</a:t>
             </a:r>
             <a:r>
-              <a:rPr lang="en-US" altLang="ko-KR"/>
+              <a:rPr lang="en-US" altLang="ko-KR" dirty="0"/>
               <a:t>]</a:t>
             </a:r>
           </a:p>
           <a:p>
             <a:r>
-              <a:rPr lang="ko-KR" altLang="en-US"/>
+              <a:rPr lang="ko-KR" altLang="en-US" dirty="0"/>
               <a:t>팔레트가 순환하는 데모를 보기 위한 시뮬레이션 웹 프로그램을 만든다</a:t>
             </a:r>
             <a:r>
-              <a:rPr lang="en-US" altLang="ko-KR"/>
+              <a:rPr lang="en-US" altLang="ko-KR" dirty="0"/>
               <a:t>.</a:t>
             </a:r>
           </a:p>
           <a:p>
             <a:r>
-              <a:rPr lang="ko-KR" altLang="en-US"/>
+              <a:rPr lang="ko-KR" altLang="en-US" dirty="0"/>
               <a:t>예시와 같이 평면도</a:t>
             </a:r>
             <a:r>
-              <a:rPr lang="en-US" altLang="ko-KR"/>
+              <a:rPr lang="en-US" altLang="ko-KR" dirty="0"/>
               <a:t>(2D)</a:t>
             </a:r>
             <a:r>
-              <a:rPr lang="ko-KR" altLang="en-US"/>
+              <a:rPr lang="ko-KR" altLang="en-US" dirty="0"/>
               <a:t>로 간단히 만들며 팔레트가 있으면 노드 색상만 노랗게 바꾼다</a:t>
             </a:r>
             <a:r>
-              <a:rPr lang="en-US" altLang="ko-KR"/>
+              <a:rPr lang="en-US" altLang="ko-KR" dirty="0"/>
               <a:t>.</a:t>
             </a:r>
           </a:p>
           <a:p>
             <a:r>
-              <a:rPr lang="ko-KR" altLang="en-US"/>
+              <a:rPr lang="ko-KR" altLang="en-US" dirty="0"/>
               <a:t>시뮬레이션 시작과 중지 버튼을 만들고</a:t>
             </a:r>
             <a:r>
-              <a:rPr lang="en-US" altLang="ko-KR"/>
+              <a:rPr lang="en-US" altLang="ko-KR" dirty="0"/>
               <a:t>, </a:t>
             </a:r>
             <a:r>
-              <a:rPr lang="ko-KR" altLang="en-US"/>
+              <a:rPr lang="ko-KR" altLang="en-US" dirty="0"/>
               <a:t>처음 팔레트가 있는 노드를 복수로 선택하게 한다</a:t>
             </a:r>
             <a:r>
-              <a:rPr lang="en-US" altLang="ko-KR"/>
+              <a:rPr lang="en-US" altLang="ko-KR" dirty="0"/>
               <a:t>.</a:t>
             </a:r>
           </a:p>
           <a:p>
             <a:r>
-              <a:rPr lang="ko-KR" altLang="en-US"/>
+              <a:rPr lang="ko-KR" altLang="en-US" dirty="0"/>
               <a:t>각 링크의 이동시간을 초 단위로 설정할 수 있게 한다</a:t>
             </a:r>
             <a:r>
-              <a:rPr lang="en-US" altLang="ko-KR"/>
+              <a:rPr lang="en-US" altLang="ko-KR" dirty="0"/>
               <a:t>.</a:t>
             </a:r>
           </a:p>
           <a:p>
             <a:r>
-              <a:rPr lang="ko-KR" altLang="en-US"/>
+              <a:rPr lang="ko-KR" altLang="en-US" dirty="0"/>
               <a:t>시뮬레이션은 </a:t>
             </a:r>
             <a:r>
-              <a:rPr lang="en-US" altLang="ko-KR"/>
+              <a:rPr lang="en-US" altLang="ko-KR" dirty="0"/>
               <a:t>1</a:t>
             </a:r>
             <a:r>
-              <a:rPr lang="ko-KR" altLang="en-US"/>
+              <a:rPr lang="ko-KR" altLang="en-US" dirty="0"/>
               <a:t>부터 </a:t>
             </a:r>
             <a:r>
-              <a:rPr lang="en-US" altLang="ko-KR"/>
+              <a:rPr lang="en-US" altLang="ko-KR" dirty="0"/>
               <a:t>100</a:t>
             </a:r>
             <a:r>
-              <a:rPr lang="ko-KR" altLang="en-US"/>
+              <a:rPr lang="ko-KR" altLang="en-US" dirty="0"/>
               <a:t>배까지 가속할 수 있게 한다</a:t>
             </a:r>
             <a:r>
-              <a:rPr lang="en-US" altLang="ko-KR"/>
+              <a:rPr lang="en-US" altLang="ko-KR" dirty="0"/>
               <a:t>.</a:t>
             </a:r>
           </a:p>
           <a:p>
             <a:r>
-              <a:rPr lang="ko-KR" altLang="en-US"/>
+              <a:rPr lang="ko-KR" altLang="en-US" dirty="0"/>
               <a:t>시뮬레이션 실행 시 화면을 녹화할 수 있게 한다</a:t>
             </a:r>
             <a:r>
-              <a:rPr lang="en-US" altLang="ko-KR"/>
+              <a:rPr lang="en-US" altLang="ko-KR" dirty="0"/>
               <a:t>.</a:t>
             </a:r>
           </a:p>
           <a:p>
             <a:r>
-              <a:rPr lang="ko-KR" altLang="en-US"/>
+              <a:rPr lang="ko-KR" altLang="en-US" dirty="0"/>
               <a:t>팔레트가 </a:t>
             </a:r>
             <a:r>
-              <a:rPr lang="en-US" altLang="ko-KR"/>
+              <a:rPr lang="en-US" altLang="ko-KR" dirty="0"/>
               <a:t>A</a:t>
             </a:r>
             <a:r>
-              <a:rPr lang="ko-KR" altLang="en-US"/>
+              <a:rPr lang="ko-KR" altLang="en-US" dirty="0"/>
               <a:t>에서 다시 </a:t>
             </a:r>
             <a:r>
-              <a:rPr lang="en-US" altLang="ko-KR"/>
+              <a:rPr lang="en-US" altLang="ko-KR" dirty="0"/>
               <a:t>A</a:t>
             </a:r>
             <a:r>
-              <a:rPr lang="ko-KR" altLang="en-US"/>
+              <a:rPr lang="ko-KR" altLang="en-US" dirty="0"/>
               <a:t>로 한바퀴 순환하는 평균사이클타임을 표시한다</a:t>
             </a:r>
             <a:r>
-              <a:rPr lang="en-US" altLang="ko-KR"/>
+              <a:rPr lang="en-US" altLang="ko-KR" dirty="0"/>
               <a:t>.</a:t>
             </a:r>
           </a:p>
           <a:p>
             <a:r>
-              <a:rPr lang="ko-KR" altLang="en-US"/>
+              <a:rPr lang="ko-KR" altLang="en-US" dirty="0"/>
               <a:t>그리고 전체 시뮬레이션 시간을 시</a:t>
             </a:r>
             <a:r>
-              <a:rPr lang="en-US" altLang="ko-KR"/>
+              <a:rPr lang="en-US" altLang="ko-KR" dirty="0"/>
               <a:t>:</a:t>
             </a:r>
             <a:r>
-              <a:rPr lang="ko-KR" altLang="en-US"/>
+              <a:rPr lang="ko-KR" altLang="en-US" dirty="0"/>
               <a:t>분</a:t>
             </a:r>
             <a:r>
-              <a:rPr lang="en-US" altLang="ko-KR"/>
+              <a:rPr lang="en-US" altLang="ko-KR" dirty="0"/>
               <a:t>:</a:t>
             </a:r>
             <a:r>
-              <a:rPr lang="ko-KR" altLang="en-US"/>
+              <a:rPr lang="ko-KR" altLang="en-US" dirty="0"/>
               <a:t>초 로 표시한다</a:t>
             </a:r>
             <a:r>
-              <a:rPr lang="en-US" altLang="ko-KR"/>
+              <a:rPr lang="en-US" altLang="ko-KR" dirty="0"/>
               <a:t>.</a:t>
             </a:r>
           </a:p>
@@ -4412,6 +4469,933 @@
     <p:extLst>
       <p:ext uri="{BB962C8B-B14F-4D97-AF65-F5344CB8AC3E}">
         <p14:creationId xmlns:p14="http://schemas.microsoft.com/office/powerpoint/2010/main" val="2461801418"/>
+      </p:ext>
+    </p:extLst>
+  </p:cSld>
+  <p:clrMapOvr>
+    <a:masterClrMapping/>
+  </p:clrMapOvr>
+</p:sld>
+</file>
+
+<file path=ppt/slides/slide3.xml><?xml version="1.0" encoding="utf-8"?>
+<p:sld xmlns:a="http://schemas.openxmlformats.org/drawingml/2006/main" xmlns:r="http://schemas.openxmlformats.org/officeDocument/2006/relationships" xmlns:p="http://schemas.openxmlformats.org/presentationml/2006/main">
+  <p:cSld>
+    <p:spTree>
+      <p:nvGrpSpPr>
+        <p:cNvPr id="1" name="">
+          <a:extLst>
+            <a:ext uri="{FF2B5EF4-FFF2-40B4-BE49-F238E27FC236}">
+              <a16:creationId xmlns:a16="http://schemas.microsoft.com/office/drawing/2014/main" id="{2D010EC0-5D8B-C1FB-36BB-8F9590C5854B}"/>
+            </a:ext>
+          </a:extLst>
+        </p:cNvPr>
+        <p:cNvGrpSpPr/>
+        <p:nvPr/>
+      </p:nvGrpSpPr>
+      <p:grpSpPr>
+        <a:xfrm>
+          <a:off x="0" y="0"/>
+          <a:ext cx="0" cy="0"/>
+          <a:chOff x="0" y="0"/>
+          <a:chExt cx="0" cy="0"/>
+        </a:xfrm>
+      </p:grpSpPr>
+      <p:sp>
+        <p:nvSpPr>
+          <p:cNvPr id="25" name="TextBox 24">
+            <a:extLst>
+              <a:ext uri="{FF2B5EF4-FFF2-40B4-BE49-F238E27FC236}">
+                <a16:creationId xmlns:a16="http://schemas.microsoft.com/office/drawing/2014/main" id="{7037314D-3D7F-F1BD-7F96-BB41A1E4C51D}"/>
+              </a:ext>
+            </a:extLst>
+          </p:cNvPr>
+          <p:cNvSpPr txBox="1"/>
+          <p:nvPr/>
+        </p:nvSpPr>
+        <p:spPr>
+          <a:xfrm>
+            <a:off x="463640" y="195803"/>
+            <a:ext cx="11264720" cy="5799311"/>
+          </a:xfrm>
+          <a:prstGeom prst="rect">
+            <a:avLst/>
+          </a:prstGeom>
+          <a:noFill/>
+        </p:spPr>
+        <p:txBody>
+          <a:bodyPr wrap="square" rtlCol="0">
+            <a:noAutofit/>
+          </a:bodyPr>
+          <a:lstStyle/>
+          <a:p>
+            <a:r>
+              <a:rPr lang="en-US" altLang="ko-KR" sz="1200" dirty="0"/>
+              <a:t>[</a:t>
+            </a:r>
+            <a:r>
+              <a:rPr lang="ko-KR" altLang="en-US" sz="1200" dirty="0"/>
+              <a:t>설명</a:t>
+            </a:r>
+            <a:r>
+              <a:rPr lang="en-US" altLang="ko-KR" sz="1200" dirty="0"/>
+              <a:t>]</a:t>
+            </a:r>
+          </a:p>
+          <a:p>
+            <a:r>
+              <a:rPr lang="ko-KR" altLang="en-US" sz="1200" dirty="0"/>
+              <a:t>이것은 팔레트를 순환하는 데모 시나리오를 보는 시뮬레이션이다</a:t>
+            </a:r>
+            <a:r>
+              <a:rPr lang="en-US" altLang="ko-KR" sz="1200" dirty="0"/>
+              <a:t>.</a:t>
+            </a:r>
+          </a:p>
+          <a:p>
+            <a:r>
+              <a:rPr lang="en-US" altLang="ko-KR" sz="1200" dirty="0"/>
+              <a:t>A, B, C, D, X1~X6</a:t>
+            </a:r>
+            <a:r>
+              <a:rPr lang="ko-KR" altLang="en-US" sz="1200" dirty="0"/>
+              <a:t>는 팔레트가 놓여지는 곳으로 노드라 한다</a:t>
+            </a:r>
+            <a:r>
+              <a:rPr lang="en-US" altLang="ko-KR" sz="1200" dirty="0"/>
+              <a:t>.</a:t>
+            </a:r>
+          </a:p>
+          <a:p>
+            <a:r>
+              <a:rPr lang="ko-KR" altLang="en-US" sz="1200" dirty="0"/>
+              <a:t>팔레트는 </a:t>
+            </a:r>
+            <a:r>
+              <a:rPr lang="en-US" altLang="ko-KR" sz="1200" dirty="0"/>
+              <a:t>A</a:t>
+            </a:r>
+            <a:r>
+              <a:rPr lang="ko-KR" altLang="en-US" sz="1200" dirty="0"/>
+              <a:t>에서 </a:t>
+            </a:r>
+            <a:r>
+              <a:rPr lang="en-US" altLang="ko-KR" sz="1200" dirty="0"/>
+              <a:t>B</a:t>
+            </a:r>
+            <a:r>
+              <a:rPr lang="ko-KR" altLang="en-US" sz="1200" dirty="0"/>
+              <a:t>로</a:t>
+            </a:r>
+            <a:r>
+              <a:rPr lang="en-US" altLang="ko-KR" sz="1200" dirty="0"/>
+              <a:t>, B</a:t>
+            </a:r>
+            <a:r>
+              <a:rPr lang="ko-KR" altLang="en-US" sz="1200" dirty="0"/>
+              <a:t>에서 </a:t>
+            </a:r>
+            <a:r>
+              <a:rPr lang="en-US" altLang="ko-KR" sz="1200" dirty="0"/>
+              <a:t>C</a:t>
+            </a:r>
+            <a:r>
+              <a:rPr lang="ko-KR" altLang="en-US" sz="1200" dirty="0"/>
+              <a:t>로</a:t>
+            </a:r>
+            <a:r>
+              <a:rPr lang="en-US" altLang="ko-KR" sz="1200" dirty="0"/>
+              <a:t>, C</a:t>
+            </a:r>
+            <a:r>
+              <a:rPr lang="ko-KR" altLang="en-US" sz="1200" dirty="0"/>
+              <a:t>에서 </a:t>
+            </a:r>
+            <a:r>
+              <a:rPr lang="en-US" altLang="ko-KR" sz="1200" dirty="0"/>
+              <a:t>D</a:t>
+            </a:r>
+            <a:r>
+              <a:rPr lang="ko-KR" altLang="en-US" sz="1200" dirty="0"/>
+              <a:t>로</a:t>
+            </a:r>
+            <a:r>
+              <a:rPr lang="en-US" altLang="ko-KR" sz="1200" dirty="0"/>
+              <a:t>, D</a:t>
+            </a:r>
+            <a:r>
+              <a:rPr lang="ko-KR" altLang="en-US" sz="1200" dirty="0"/>
+              <a:t>에서 </a:t>
+            </a:r>
+            <a:r>
+              <a:rPr lang="en-US" altLang="ko-KR" sz="1200" dirty="0"/>
+              <a:t>X</a:t>
+            </a:r>
+            <a:r>
+              <a:rPr lang="ko-KR" altLang="en-US" sz="1200" dirty="0"/>
+              <a:t>로</a:t>
+            </a:r>
+            <a:r>
+              <a:rPr lang="en-US" altLang="ko-KR" sz="1200" dirty="0"/>
+              <a:t>, X</a:t>
+            </a:r>
+            <a:r>
+              <a:rPr lang="ko-KR" altLang="en-US" sz="1200" dirty="0"/>
+              <a:t>에서 </a:t>
+            </a:r>
+            <a:r>
+              <a:rPr lang="en-US" altLang="ko-KR" sz="1200" dirty="0"/>
+              <a:t>A</a:t>
+            </a:r>
+            <a:r>
+              <a:rPr lang="ko-KR" altLang="en-US" sz="1200" dirty="0"/>
+              <a:t>로 이동한다</a:t>
+            </a:r>
+            <a:r>
+              <a:rPr lang="en-US" altLang="ko-KR" sz="1200" dirty="0"/>
+              <a:t>.</a:t>
+            </a:r>
+          </a:p>
+          <a:p>
+            <a:r>
+              <a:rPr lang="ko-KR" altLang="en-US" sz="1200" dirty="0"/>
+              <a:t>여기에서 </a:t>
+            </a:r>
+            <a:r>
+              <a:rPr lang="en-US" altLang="ko-KR" sz="1200" dirty="0"/>
+              <a:t>X</a:t>
+            </a:r>
+            <a:r>
+              <a:rPr lang="ko-KR" altLang="en-US" sz="1200" dirty="0"/>
+              <a:t>는 </a:t>
+            </a:r>
+            <a:r>
+              <a:rPr lang="en-US" altLang="ko-KR" sz="1200" dirty="0"/>
+              <a:t>X1</a:t>
+            </a:r>
+            <a:r>
+              <a:rPr lang="ko-KR" altLang="en-US" sz="1200" dirty="0"/>
+              <a:t>에서 </a:t>
+            </a:r>
+            <a:r>
+              <a:rPr lang="en-US" altLang="ko-KR" sz="1200" dirty="0"/>
+              <a:t>X6</a:t>
+            </a:r>
+            <a:r>
+              <a:rPr lang="ko-KR" altLang="en-US" sz="1200" dirty="0"/>
+              <a:t>중 어느 하나일 수 있고</a:t>
+            </a:r>
+            <a:r>
+              <a:rPr lang="en-US" altLang="ko-KR" sz="1200" dirty="0"/>
+              <a:t>, </a:t>
+            </a:r>
+            <a:r>
+              <a:rPr lang="ko-KR" altLang="en-US" sz="1200" dirty="0"/>
+              <a:t>하나가 아니라 여러 개를 선택하여 이동시킬 수 있다</a:t>
+            </a:r>
+            <a:r>
+              <a:rPr lang="en-US" altLang="ko-KR" sz="1200" dirty="0"/>
+              <a:t>.</a:t>
+            </a:r>
+          </a:p>
+          <a:p>
+            <a:r>
+              <a:rPr lang="en-US" altLang="ko-KR" sz="1200" dirty="0"/>
+              <a:t>A</a:t>
+            </a:r>
+            <a:r>
+              <a:rPr lang="ko-KR" altLang="en-US" sz="1200" dirty="0"/>
+              <a:t>에서 </a:t>
+            </a:r>
+            <a:r>
+              <a:rPr lang="en-US" altLang="ko-KR" sz="1200" dirty="0"/>
+              <a:t>B</a:t>
+            </a:r>
+            <a:r>
+              <a:rPr lang="ko-KR" altLang="en-US" sz="1200" dirty="0"/>
+              <a:t>는 </a:t>
+            </a:r>
+            <a:r>
+              <a:rPr lang="en-US" altLang="ko-KR" sz="1200" dirty="0"/>
+              <a:t>SEER </a:t>
+            </a:r>
+            <a:r>
+              <a:rPr lang="ko-KR" altLang="en-US" sz="1200" dirty="0"/>
+              <a:t>지게차</a:t>
+            </a:r>
+            <a:r>
+              <a:rPr lang="en-US" altLang="ko-KR" sz="1200" dirty="0"/>
+              <a:t>, B</a:t>
+            </a:r>
+            <a:r>
+              <a:rPr lang="ko-KR" altLang="en-US" sz="1200" dirty="0"/>
+              <a:t>에서 </a:t>
+            </a:r>
+            <a:r>
+              <a:rPr lang="en-US" altLang="ko-KR" sz="1200" dirty="0"/>
+              <a:t>C</a:t>
+            </a:r>
+            <a:r>
+              <a:rPr lang="ko-KR" altLang="en-US" sz="1200" dirty="0"/>
+              <a:t>는 </a:t>
+            </a:r>
+            <a:r>
+              <a:rPr lang="en-US" altLang="ko-KR" sz="1200" dirty="0"/>
+              <a:t>SEER AMR, C</a:t>
+            </a:r>
+            <a:r>
+              <a:rPr lang="ko-KR" altLang="en-US" sz="1200" dirty="0"/>
+              <a:t>에서 </a:t>
+            </a:r>
+            <a:r>
+              <a:rPr lang="en-US" altLang="ko-KR" sz="1200" dirty="0"/>
+              <a:t>D</a:t>
+            </a:r>
+            <a:r>
+              <a:rPr lang="ko-KR" altLang="en-US" sz="1200" dirty="0"/>
+              <a:t>는 </a:t>
+            </a:r>
+            <a:r>
+              <a:rPr lang="en-US" altLang="ko-KR" sz="1200" dirty="0"/>
+              <a:t>HDX </a:t>
+            </a:r>
+            <a:r>
+              <a:rPr lang="ko-KR" altLang="en-US" sz="1200" dirty="0"/>
+              <a:t>지게차가 팔레트를 이송한다</a:t>
+            </a:r>
+            <a:r>
+              <a:rPr lang="en-US" altLang="ko-KR" sz="1200" dirty="0"/>
+              <a:t>.</a:t>
+            </a:r>
+          </a:p>
+          <a:p>
+            <a:r>
+              <a:rPr lang="en-US" altLang="ko-KR" sz="1200" dirty="0"/>
+              <a:t>D</a:t>
+            </a:r>
+            <a:r>
+              <a:rPr lang="ko-KR" altLang="en-US" sz="1200" dirty="0"/>
+              <a:t>에서 어떤 </a:t>
+            </a:r>
+            <a:r>
+              <a:rPr lang="en-US" altLang="ko-KR" sz="1200" dirty="0"/>
+              <a:t>X, </a:t>
+            </a:r>
+            <a:r>
+              <a:rPr lang="ko-KR" altLang="en-US" sz="1200" dirty="0"/>
+              <a:t>어떤 </a:t>
+            </a:r>
+            <a:r>
+              <a:rPr lang="en-US" altLang="ko-KR" sz="1200" dirty="0"/>
+              <a:t>X</a:t>
+            </a:r>
+            <a:r>
+              <a:rPr lang="ko-KR" altLang="en-US" sz="1200" dirty="0"/>
+              <a:t>에서 다른 </a:t>
+            </a:r>
+            <a:r>
+              <a:rPr lang="en-US" altLang="ko-KR" sz="1200" dirty="0"/>
+              <a:t>X, </a:t>
+            </a:r>
+            <a:r>
+              <a:rPr lang="ko-KR" altLang="en-US" sz="1200" dirty="0"/>
+              <a:t>마지막 </a:t>
+            </a:r>
+            <a:r>
+              <a:rPr lang="en-US" altLang="ko-KR" sz="1200" dirty="0"/>
+              <a:t>X</a:t>
+            </a:r>
+            <a:r>
+              <a:rPr lang="ko-KR" altLang="en-US" sz="1200" dirty="0"/>
+              <a:t>에서 </a:t>
+            </a:r>
+            <a:r>
+              <a:rPr lang="en-US" altLang="ko-KR" sz="1200" dirty="0"/>
+              <a:t>A</a:t>
+            </a:r>
+            <a:r>
+              <a:rPr lang="ko-KR" altLang="en-US" sz="1200" dirty="0"/>
+              <a:t>로 이동하는 과정은 </a:t>
+            </a:r>
+            <a:r>
+              <a:rPr lang="en-US" altLang="ko-KR" sz="1200" dirty="0"/>
+              <a:t>4way </a:t>
+            </a:r>
+            <a:r>
+              <a:rPr lang="ko-KR" altLang="en-US" sz="1200" dirty="0"/>
+              <a:t>셔틀이 담당하며</a:t>
+            </a:r>
+            <a:r>
+              <a:rPr lang="en-US" altLang="ko-KR" sz="1200" dirty="0"/>
+              <a:t>, D</a:t>
+            </a:r>
+            <a:r>
+              <a:rPr lang="ko-KR" altLang="en-US" sz="1200" dirty="0"/>
+              <a:t>에서 </a:t>
+            </a:r>
+            <a:r>
+              <a:rPr lang="en-US" altLang="ko-KR" sz="1200" dirty="0"/>
+              <a:t>A</a:t>
+            </a:r>
+            <a:r>
+              <a:rPr lang="ko-KR" altLang="en-US" sz="1200" dirty="0"/>
+              <a:t>로 팔레트를 이송하는 </a:t>
+            </a:r>
+            <a:r>
+              <a:rPr lang="en-US" altLang="ko-KR" sz="1200" dirty="0"/>
+              <a:t>X</a:t>
+            </a:r>
+            <a:r>
+              <a:rPr lang="ko-KR" altLang="en-US" sz="1200" dirty="0"/>
+              <a:t>의 개수는 선택할 수 있다</a:t>
+            </a:r>
+            <a:r>
+              <a:rPr lang="en-US" altLang="ko-KR" sz="1200" dirty="0"/>
+              <a:t>. </a:t>
+            </a:r>
+            <a:r>
+              <a:rPr lang="ko-KR" altLang="en-US" sz="1200" dirty="0"/>
+              <a:t>따라서 사용할 </a:t>
+            </a:r>
+            <a:r>
+              <a:rPr lang="en-US" altLang="ko-KR" sz="1200" dirty="0"/>
+              <a:t>X</a:t>
+            </a:r>
+            <a:r>
+              <a:rPr lang="ko-KR" altLang="en-US" sz="1200" dirty="0"/>
+              <a:t>를 </a:t>
+            </a:r>
+            <a:r>
+              <a:rPr lang="en-US" altLang="ko-KR" sz="1200" dirty="0"/>
+              <a:t>X1~X6</a:t>
+            </a:r>
+            <a:r>
+              <a:rPr lang="ko-KR" altLang="en-US" sz="1200" dirty="0"/>
+              <a:t>에서 선택할 수 있도록 하고 순서를 정할 수 있게 한다</a:t>
+            </a:r>
+            <a:r>
+              <a:rPr lang="en-US" altLang="ko-KR" sz="1200" dirty="0"/>
+              <a:t>.</a:t>
+            </a:r>
+          </a:p>
+          <a:p>
+            <a:r>
+              <a:rPr lang="ko-KR" altLang="en-US" sz="1200" dirty="0"/>
+              <a:t>노</a:t>
+            </a:r>
+            <a:r>
+              <a:rPr lang="ko-KR" altLang="ko-KR" sz="1200" dirty="0"/>
+              <a:t>드에는 반드시 하나의 팔레트만 놓일 수 있고, 링크에서 이동도 하나의 팔레트만 할 수 있</a:t>
+            </a:r>
+            <a:r>
+              <a:rPr lang="ko-KR" altLang="en-US" sz="1200" dirty="0"/>
+              <a:t>다</a:t>
+            </a:r>
+            <a:r>
+              <a:rPr lang="ko-KR" altLang="ko-KR" sz="1200" dirty="0"/>
+              <a:t>. </a:t>
+            </a:r>
+            <a:endParaRPr lang="en-US" altLang="ko-KR" sz="1200" dirty="0"/>
+          </a:p>
+          <a:p>
+            <a:r>
+              <a:rPr lang="ko-KR" altLang="en-US" sz="1200" dirty="0"/>
+              <a:t>모든 노드에서 팔레트 유무는 </a:t>
+            </a:r>
+            <a:r>
+              <a:rPr lang="ko-KR" altLang="en-US" sz="1200" dirty="0" err="1"/>
+              <a:t>중앙관제된다</a:t>
+            </a:r>
+            <a:r>
+              <a:rPr lang="en-US" altLang="ko-KR" sz="1200" dirty="0"/>
+              <a:t>.</a:t>
+            </a:r>
+          </a:p>
+          <a:p>
+            <a:r>
+              <a:rPr lang="ko-KR" altLang="en-US" sz="1200" dirty="0"/>
+              <a:t>작동조건은 단 하나이다</a:t>
+            </a:r>
+            <a:r>
+              <a:rPr lang="en-US" altLang="ko-KR" sz="1200" dirty="0"/>
+              <a:t>. (</a:t>
+            </a:r>
+            <a:r>
+              <a:rPr lang="ko-KR" altLang="en-US" sz="1200" dirty="0" err="1"/>
+              <a:t>이전노드에</a:t>
+            </a:r>
+            <a:r>
+              <a:rPr lang="ko-KR" altLang="en-US" sz="1200" dirty="0"/>
+              <a:t> 팔레트가 있고</a:t>
+            </a:r>
+            <a:r>
+              <a:rPr lang="en-US" altLang="ko-KR" sz="1200" dirty="0"/>
+              <a:t>, </a:t>
+            </a:r>
+            <a:r>
+              <a:rPr lang="ko-KR" altLang="en-US" sz="1200" dirty="0" err="1"/>
+              <a:t>다음노드에</a:t>
+            </a:r>
+            <a:r>
+              <a:rPr lang="ko-KR" altLang="en-US" sz="1200" dirty="0"/>
+              <a:t> 팔레트가 없으면 팔레트를 이동시킴</a:t>
+            </a:r>
+            <a:r>
+              <a:rPr lang="en-US" altLang="ko-KR" sz="1200" dirty="0"/>
+              <a:t>)</a:t>
+            </a:r>
+          </a:p>
+          <a:p>
+            <a:r>
+              <a:rPr lang="ko-KR" altLang="en-US" sz="1200" dirty="0"/>
+              <a:t>팔레트가 </a:t>
+            </a:r>
+            <a:r>
+              <a:rPr lang="ko-KR" altLang="en-US" sz="1200" dirty="0" err="1"/>
+              <a:t>다음노드까지</a:t>
+            </a:r>
+            <a:r>
+              <a:rPr lang="ko-KR" altLang="en-US" sz="1200" dirty="0"/>
+              <a:t> 완전히 옮겨진 </a:t>
+            </a:r>
+            <a:r>
+              <a:rPr lang="ko-KR" altLang="en-US" sz="1200" dirty="0" err="1"/>
+              <a:t>후에야</a:t>
+            </a:r>
+            <a:r>
+              <a:rPr lang="ko-KR" altLang="en-US" sz="1200" dirty="0"/>
+              <a:t> </a:t>
+            </a:r>
+            <a:r>
+              <a:rPr lang="ko-KR" altLang="en-US" sz="1200" dirty="0" err="1"/>
+              <a:t>이전노드와</a:t>
+            </a:r>
+            <a:r>
+              <a:rPr lang="ko-KR" altLang="en-US" sz="1200" dirty="0"/>
+              <a:t> </a:t>
+            </a:r>
+            <a:r>
+              <a:rPr lang="ko-KR" altLang="en-US" sz="1200" dirty="0" err="1"/>
+              <a:t>다음노드의</a:t>
+            </a:r>
+            <a:r>
+              <a:rPr lang="ko-KR" altLang="en-US" sz="1200" dirty="0"/>
+              <a:t> 상태는 바뀌고</a:t>
+            </a:r>
+            <a:r>
+              <a:rPr lang="en-US" altLang="ko-KR" sz="1200" dirty="0"/>
+              <a:t>, </a:t>
+            </a:r>
+            <a:r>
+              <a:rPr lang="ko-KR" altLang="en-US" sz="1200" dirty="0"/>
+              <a:t>팔레트 이동 명령도</a:t>
+            </a:r>
+            <a:br>
+              <a:rPr lang="en-US" altLang="ko-KR" sz="1200" dirty="0"/>
+            </a:br>
+            <a:r>
+              <a:rPr lang="ko-KR" altLang="en-US" sz="1200" dirty="0"/>
+              <a:t> 그 후에 생성된다</a:t>
+            </a:r>
+            <a:r>
+              <a:rPr lang="en-US" altLang="ko-KR" sz="1200" dirty="0"/>
+              <a:t>. </a:t>
+            </a:r>
+          </a:p>
+          <a:p>
+            <a:r>
+              <a:rPr lang="ko-KR" altLang="ko-KR" sz="1200" dirty="0" err="1"/>
+              <a:t>이전노드에는</a:t>
+            </a:r>
+            <a:r>
+              <a:rPr lang="ko-KR" altLang="ko-KR" sz="1200" dirty="0"/>
+              <a:t> 팔레트가 있고 </a:t>
+            </a:r>
+            <a:r>
+              <a:rPr lang="ko-KR" altLang="ko-KR" sz="1200" dirty="0" err="1"/>
+              <a:t>다음노드에</a:t>
+            </a:r>
+            <a:r>
+              <a:rPr lang="ko-KR" altLang="ko-KR" sz="1200" dirty="0"/>
+              <a:t> 없는 조건이 성립하면 여러 곳(링크)에서 동시에 팔레트가 옮겨져도 </a:t>
+            </a:r>
+            <a:r>
+              <a:rPr lang="ko-KR" altLang="en-US" sz="1200" dirty="0"/>
+              <a:t>된다</a:t>
+            </a:r>
+            <a:r>
+              <a:rPr lang="ko-KR" altLang="ko-KR" sz="1200" dirty="0"/>
+              <a:t>.</a:t>
+            </a:r>
+            <a:br>
+              <a:rPr lang="en-US" altLang="ko-KR" sz="1200" dirty="0"/>
+            </a:br>
+            <a:r>
+              <a:rPr lang="ko-KR" altLang="ko-KR" sz="1200" dirty="0"/>
+              <a:t>단지 그것들이 같은 링크에서 겹치게 해서는 안된다</a:t>
+            </a:r>
+            <a:r>
+              <a:rPr lang="en-US" altLang="ko-KR" sz="1200" dirty="0"/>
+              <a:t>.</a:t>
+            </a:r>
+          </a:p>
+          <a:p>
+            <a:endParaRPr lang="en-US" altLang="ko-KR" sz="1200" dirty="0"/>
+          </a:p>
+          <a:p>
+            <a:r>
+              <a:rPr lang="ko-KR" altLang="en-US" sz="1200" dirty="0"/>
+              <a:t>셔틀 </a:t>
+            </a:r>
+            <a:r>
+              <a:rPr lang="en-US" altLang="ko-KR" sz="1200" dirty="0"/>
+              <a:t>X-</a:t>
+            </a:r>
+            <a:r>
+              <a:rPr lang="ko-KR" altLang="en-US" sz="1200" dirty="0"/>
+              <a:t>노드 이동 경로 순서 선택 아래에 셔틀의 개수를 </a:t>
+            </a:r>
+            <a:r>
+              <a:rPr lang="en-US" altLang="ko-KR" sz="1200" dirty="0"/>
+              <a:t>1</a:t>
+            </a:r>
+            <a:r>
+              <a:rPr lang="ko-KR" altLang="en-US" sz="1200" dirty="0"/>
+              <a:t>개 또는 </a:t>
+            </a:r>
+            <a:r>
+              <a:rPr lang="en-US" altLang="ko-KR" sz="1200" dirty="0"/>
+              <a:t>2</a:t>
+            </a:r>
+            <a:r>
+              <a:rPr lang="ko-KR" altLang="en-US" sz="1200" dirty="0"/>
+              <a:t>개로 선택할 수 있게 한다</a:t>
+            </a:r>
+            <a:r>
+              <a:rPr lang="en-US" altLang="ko-KR" sz="1200" dirty="0"/>
+              <a:t>. 1</a:t>
+            </a:r>
+            <a:r>
+              <a:rPr lang="ko-KR" altLang="en-US" sz="1200" dirty="0"/>
+              <a:t>개이면 셔틀은 </a:t>
+            </a:r>
+            <a:r>
+              <a:rPr lang="en-US" altLang="ko-KR" sz="1200" dirty="0"/>
+              <a:t>1</a:t>
+            </a:r>
+            <a:r>
+              <a:rPr lang="ko-KR" altLang="en-US" sz="1200" dirty="0"/>
+              <a:t>대로만 운영한다</a:t>
+            </a:r>
+            <a:r>
+              <a:rPr lang="en-US" altLang="ko-KR" sz="1200" dirty="0"/>
+              <a:t>.</a:t>
+            </a:r>
+          </a:p>
+          <a:p>
+            <a:endParaRPr lang="en-US" altLang="ko-KR" sz="1200" dirty="0"/>
+          </a:p>
+          <a:p>
+            <a:r>
+              <a:rPr lang="en-US" altLang="ko-KR" sz="1200" dirty="0"/>
+              <a:t>SEER AMR</a:t>
+            </a:r>
+            <a:r>
+              <a:rPr lang="ko-KR" altLang="en-US" sz="1200" dirty="0"/>
+              <a:t>은 팔레트를 돌리지 않고 </a:t>
+            </a:r>
+            <a:r>
+              <a:rPr lang="en-US" altLang="ko-KR" sz="1200" dirty="0"/>
+              <a:t>AMR</a:t>
+            </a:r>
+            <a:r>
+              <a:rPr lang="ko-KR" altLang="en-US" sz="1200" dirty="0"/>
+              <a:t>만 회전하는 </a:t>
+            </a:r>
+            <a:r>
+              <a:rPr lang="ko-KR" altLang="en-US" sz="1200" dirty="0" err="1"/>
+              <a:t>키바턴을</a:t>
+            </a:r>
+            <a:r>
+              <a:rPr lang="ko-KR" altLang="en-US" sz="1200" dirty="0"/>
+              <a:t> 해야 해</a:t>
+            </a:r>
+            <a:r>
+              <a:rPr lang="en-US" altLang="ko-KR" sz="1200" dirty="0"/>
+              <a:t>. AMR</a:t>
+            </a:r>
+            <a:r>
+              <a:rPr lang="ko-KR" altLang="en-US" sz="1200" dirty="0"/>
+              <a:t>이 </a:t>
+            </a:r>
+            <a:r>
+              <a:rPr lang="en-US" altLang="ko-KR" sz="1200" dirty="0"/>
+              <a:t>B</a:t>
+            </a:r>
+            <a:r>
+              <a:rPr lang="ko-KR" altLang="en-US" sz="1200" dirty="0"/>
+              <a:t>에서 </a:t>
+            </a:r>
+            <a:r>
+              <a:rPr lang="en-US" altLang="ko-KR" sz="1200" dirty="0"/>
+              <a:t>C</a:t>
+            </a:r>
+            <a:r>
+              <a:rPr lang="ko-KR" altLang="en-US" sz="1200" dirty="0"/>
+              <a:t>로 팔레트를 이동할 때 </a:t>
+            </a:r>
+            <a:r>
+              <a:rPr lang="ko-KR" altLang="en-US" sz="1200" dirty="0" err="1"/>
+              <a:t>키바턴을</a:t>
+            </a:r>
+            <a:r>
+              <a:rPr lang="ko-KR" altLang="en-US" sz="1200" dirty="0"/>
+              <a:t> 하도록 수정해줘</a:t>
+            </a:r>
+            <a:r>
+              <a:rPr lang="en-US" altLang="ko-KR" sz="1200" dirty="0"/>
+              <a:t>. (</a:t>
+            </a:r>
+            <a:r>
+              <a:rPr lang="ko-KR" altLang="en-US" sz="1200" dirty="0"/>
+              <a:t>작업 완료 후 </a:t>
+            </a:r>
+            <a:r>
+              <a:rPr lang="en-US" altLang="ko-KR" sz="1200" dirty="0"/>
+              <a:t>5</a:t>
+            </a:r>
+            <a:r>
+              <a:rPr lang="ko-KR" altLang="en-US" sz="1200" dirty="0"/>
+              <a:t>초간 </a:t>
+            </a:r>
+            <a:r>
+              <a:rPr lang="ko-KR" altLang="en-US" sz="1200" dirty="0" err="1"/>
+              <a:t>벨소리로</a:t>
+            </a:r>
+            <a:r>
+              <a:rPr lang="ko-KR" altLang="en-US" sz="1200" dirty="0"/>
+              <a:t> 알려줘</a:t>
+            </a:r>
+            <a:r>
+              <a:rPr lang="en-US" altLang="ko-KR" sz="1200" dirty="0"/>
+              <a:t>)</a:t>
+            </a:r>
+          </a:p>
+          <a:p>
+            <a:endParaRPr lang="en-US" altLang="ko-KR" sz="1200" dirty="0"/>
+          </a:p>
+          <a:p>
+            <a:r>
+              <a:rPr lang="ko-KR" altLang="en-US" sz="1200" dirty="0"/>
+              <a:t>시뮬레이션 시작과 중지 버튼을 만들고</a:t>
+            </a:r>
+            <a:r>
+              <a:rPr lang="en-US" altLang="ko-KR" sz="1200" dirty="0"/>
+              <a:t>, </a:t>
+            </a:r>
+            <a:r>
+              <a:rPr lang="ko-KR" altLang="en-US" sz="1200" dirty="0"/>
+              <a:t>처음 팔레트가 있는 노드를 복수로 선택할 수 있게 한다</a:t>
+            </a:r>
+            <a:r>
+              <a:rPr lang="en-US" altLang="ko-KR" sz="1200" dirty="0"/>
+              <a:t>.</a:t>
+            </a:r>
+          </a:p>
+          <a:p>
+            <a:endParaRPr lang="en-US" altLang="ko-KR" sz="1200" dirty="0"/>
+          </a:p>
+          <a:p>
+            <a:r>
+              <a:rPr lang="ko-KR" altLang="en-US" sz="1200" dirty="0" err="1"/>
+              <a:t>운영순환팔레트수</a:t>
+            </a:r>
+            <a:r>
+              <a:rPr lang="ko-KR" altLang="en-US" sz="1200" dirty="0"/>
+              <a:t> 대신에 팔레트 위치를 선택할 수 있게 해줘</a:t>
+            </a:r>
+            <a:r>
+              <a:rPr lang="en-US" altLang="ko-KR" sz="1200" dirty="0"/>
+              <a:t>. </a:t>
+            </a:r>
+            <a:r>
+              <a:rPr lang="ko-KR" altLang="en-US" sz="1200" dirty="0"/>
+              <a:t>전체 노드가 버튼식으로 나열되어 있어서 선택하면 그곳에 팔레트</a:t>
+            </a:r>
+            <a:r>
+              <a:rPr lang="en-US" altLang="ko-KR" sz="1200" dirty="0"/>
+              <a:t>(</a:t>
+            </a:r>
+            <a:r>
+              <a:rPr lang="ko-KR" altLang="en-US" sz="1200" dirty="0"/>
+              <a:t>박스포함</a:t>
+            </a:r>
+            <a:r>
+              <a:rPr lang="en-US" altLang="ko-KR" sz="1200" dirty="0"/>
+              <a:t>)</a:t>
+            </a:r>
+            <a:r>
+              <a:rPr lang="ko-KR" altLang="en-US" sz="1200" dirty="0"/>
+              <a:t>가 존재하고 그 상태로 시작하도록 해줘</a:t>
+            </a:r>
+            <a:r>
+              <a:rPr lang="en-US" altLang="ko-KR" sz="1200" dirty="0"/>
+              <a:t>.</a:t>
+            </a:r>
+          </a:p>
+          <a:p>
+            <a:r>
+              <a:rPr lang="en-US" altLang="ko-KR" sz="1200" dirty="0"/>
+              <a:t>‘</a:t>
+            </a:r>
+            <a:r>
+              <a:rPr lang="ko-KR" altLang="en-US" sz="1200" dirty="0"/>
+              <a:t>외부구간 자동 이송</a:t>
+            </a:r>
+            <a:r>
+              <a:rPr lang="en-US" altLang="ko-KR" sz="1200"/>
+              <a:t>’</a:t>
+            </a:r>
+            <a:r>
+              <a:rPr lang="ko-KR" altLang="en-US" sz="1200"/>
+              <a:t>은 </a:t>
+            </a:r>
+            <a:r>
+              <a:rPr lang="ko-KR" altLang="en-US" sz="1200" dirty="0"/>
+              <a:t>당연한 기능이라 없애도 돼</a:t>
+            </a:r>
+            <a:r>
+              <a:rPr lang="en-US" altLang="ko-KR" sz="1200" dirty="0"/>
+              <a:t>. </a:t>
+            </a:r>
+            <a:r>
+              <a:rPr lang="ko-KR" altLang="en-US" sz="1200" dirty="0"/>
+              <a:t>그 자리에 팔</a:t>
+            </a:r>
+            <a:r>
+              <a:rPr lang="en-US" altLang="ko-KR" sz="1200" dirty="0"/>
+              <a:t>’</a:t>
+            </a:r>
+            <a:r>
+              <a:rPr lang="ko-KR" altLang="en-US" sz="1200" dirty="0" err="1"/>
+              <a:t>레트가</a:t>
+            </a:r>
+            <a:r>
+              <a:rPr lang="ko-KR" altLang="en-US" sz="1200" dirty="0"/>
+              <a:t> 있으면 바로 미션 생성</a:t>
+            </a:r>
+            <a:r>
+              <a:rPr lang="en-US" altLang="ko-KR" sz="1200" dirty="0"/>
+              <a:t>’</a:t>
+            </a:r>
+          </a:p>
+          <a:p>
+            <a:endParaRPr lang="en-US" altLang="ko-KR" sz="1200" dirty="0"/>
+          </a:p>
+          <a:p>
+            <a:endParaRPr lang="en-US" altLang="ko-KR" sz="1200" dirty="0"/>
+          </a:p>
+          <a:p>
+            <a:r>
+              <a:rPr lang="ko-KR" altLang="en-US" sz="1200" dirty="0"/>
+              <a:t>각 링크의 이동시간을 초 단위로 설정할 수 있게 한다</a:t>
+            </a:r>
+            <a:r>
+              <a:rPr lang="en-US" altLang="ko-KR" sz="1200" dirty="0"/>
+              <a:t>.</a:t>
+            </a:r>
+          </a:p>
+          <a:p>
+            <a:endParaRPr lang="en-US" altLang="ko-KR" sz="1200" dirty="0"/>
+          </a:p>
+          <a:p>
+            <a:r>
+              <a:rPr lang="ko-KR" altLang="en-US" sz="1200" dirty="0"/>
+              <a:t>처음 </a:t>
+            </a:r>
+            <a:r>
+              <a:rPr lang="en-US" altLang="ko-KR" sz="1200" dirty="0"/>
+              <a:t>A</a:t>
+            </a:r>
+            <a:r>
+              <a:rPr lang="ko-KR" altLang="en-US" sz="1200" dirty="0"/>
+              <a:t>에서 출발한 팔레트가 다시 </a:t>
+            </a:r>
+            <a:r>
+              <a:rPr lang="en-US" altLang="ko-KR" sz="1200" dirty="0"/>
+              <a:t>A</a:t>
+            </a:r>
+            <a:r>
+              <a:rPr lang="ko-KR" altLang="en-US" sz="1200" dirty="0"/>
+              <a:t>로 한바퀴 순환하는 평균사이클타임을 표시한다</a:t>
+            </a:r>
+            <a:r>
+              <a:rPr lang="en-US" altLang="ko-KR" sz="1200" dirty="0"/>
+              <a:t>. </a:t>
+            </a:r>
+            <a:r>
+              <a:rPr lang="ko-KR" altLang="en-US" sz="1200" dirty="0"/>
+              <a:t>그리고 그 순환 횟수를 표시한다</a:t>
+            </a:r>
+            <a:r>
+              <a:rPr lang="en-US" altLang="ko-KR" sz="1200" dirty="0"/>
+              <a:t>. </a:t>
+            </a:r>
+            <a:r>
+              <a:rPr lang="ko-KR" altLang="en-US" sz="1200" dirty="0"/>
+              <a:t>그리고 전체 시뮬레이션 시간을 시</a:t>
+            </a:r>
+            <a:r>
+              <a:rPr lang="en-US" altLang="ko-KR" sz="1200" dirty="0"/>
+              <a:t>:</a:t>
+            </a:r>
+            <a:r>
+              <a:rPr lang="ko-KR" altLang="en-US" sz="1200" dirty="0"/>
+              <a:t>분</a:t>
+            </a:r>
+            <a:r>
+              <a:rPr lang="en-US" altLang="ko-KR" sz="1200" dirty="0"/>
+              <a:t>:</a:t>
+            </a:r>
+            <a:r>
+              <a:rPr lang="ko-KR" altLang="en-US" sz="1200" dirty="0"/>
+              <a:t>초 로 표시한다</a:t>
+            </a:r>
+            <a:r>
+              <a:rPr lang="en-US" altLang="ko-KR" sz="1200" dirty="0"/>
+              <a:t>.</a:t>
+            </a:r>
+          </a:p>
+          <a:p>
+            <a:endParaRPr lang="en-US" altLang="ko-KR" sz="1200" dirty="0"/>
+          </a:p>
+          <a:p>
+            <a:r>
+              <a:rPr lang="ko-KR" altLang="en-US" sz="1200" dirty="0"/>
+              <a:t>시뮬레이션 실행 시 화면을 녹화할 수 있게 하고 이것을 </a:t>
+            </a:r>
+            <a:r>
+              <a:rPr lang="en-US" altLang="ko-KR" sz="1200" dirty="0"/>
+              <a:t>mp4</a:t>
+            </a:r>
+            <a:r>
+              <a:rPr lang="ko-KR" altLang="en-US" sz="1200" dirty="0"/>
+              <a:t>파일로 다운로드할 수 있게 한다</a:t>
+            </a:r>
+            <a:r>
+              <a:rPr lang="en-US" altLang="ko-KR" sz="1200" dirty="0"/>
+              <a:t>.</a:t>
+            </a:r>
+          </a:p>
+          <a:p>
+            <a:endParaRPr lang="en-US" altLang="ko-KR" sz="1200" dirty="0"/>
+          </a:p>
+        </p:txBody>
+      </p:sp>
+    </p:spTree>
+    <p:extLst>
+      <p:ext uri="{BB962C8B-B14F-4D97-AF65-F5344CB8AC3E}">
+        <p14:creationId xmlns:p14="http://schemas.microsoft.com/office/powerpoint/2010/main" val="2426575685"/>
       </p:ext>
     </p:extLst>
   </p:cSld>
